--- a/MODULE_INTRODUCTION_TO_WEB_TECHNOLOGIES/Module_1.pptx
+++ b/MODULE_INTRODUCTION_TO_WEB_TECHNOLOGIES/Module_1.pptx
@@ -1763,7 +1763,7 @@
               <a:buNone/>
             </a:pPr>
             <a:r>
-              <a:rPr lang="en-US" sz="2000" b="1" kern="0" spc="200" dirty="0">
+              <a:rPr lang="en-US" sz="1400" b="1" kern="0" spc="200" dirty="0">
                 <a:solidFill>
                   <a:srgbClr val="02C39A"/>
                 </a:solidFill>
@@ -1773,7 +1773,7 @@
               </a:rPr>
               <a:t>A CLASSROOM PRIMER ON WEB TECHNOLOGY</a:t>
             </a:r>
-            <a:endParaRPr lang="en-US" sz="2000" dirty="0"/>
+            <a:endParaRPr lang="en-US" sz="1400" dirty="0"/>
           </a:p>
         </p:txBody>
       </p:sp>
@@ -1802,7 +1802,7 @@
               <a:buNone/>
             </a:pPr>
             <a:r>
-              <a:rPr lang="en-US" sz="6600" b="1" dirty="0">
+              <a:rPr lang="en-US" sz="4800" b="1" dirty="0">
                 <a:solidFill>
                   <a:srgbClr val="FFFFFF"/>
                 </a:solidFill>
@@ -1812,7 +1812,7 @@
               </a:rPr>
               <a:t>Internet &amp; the World Wide Web</a:t>
             </a:r>
-            <a:endParaRPr lang="en-US" sz="6600" dirty="0"/>
+            <a:endParaRPr lang="en-US" sz="4800" dirty="0"/>
           </a:p>
         </p:txBody>
       </p:sp>
@@ -1844,7 +1844,7 @@
               <a:buNone/>
             </a:pPr>
             <a:r>
-              <a:rPr lang="en-US" sz="2800" dirty="0">
+              <a:rPr lang="en-US" dirty="0">
                 <a:solidFill>
                   <a:srgbClr val="CFF7EE"/>
                 </a:solidFill>
@@ -1854,7 +1854,7 @@
               </a:rPr>
               <a:t>Browsers, Servers, HTTP/HTTPS, Client–Server Architecture,</a:t>
             </a:r>
-            <a:endParaRPr lang="en-US" sz="2800" dirty="0"/>
+            <a:endParaRPr lang="en-US" dirty="0"/>
           </a:p>
           <a:p>
             <a:pPr marL="0" indent="0">
@@ -1864,7 +1864,7 @@
               <a:buNone/>
             </a:pPr>
             <a:r>
-              <a:rPr lang="en-US" sz="2800" dirty="0">
+              <a:rPr lang="en-US" dirty="0">
                 <a:solidFill>
                   <a:srgbClr val="CFF7EE"/>
                 </a:solidFill>
@@ -1874,7 +1874,7 @@
               </a:rPr>
               <a:t>HTML Basics &amp; Web Page Structure</a:t>
             </a:r>
-            <a:endParaRPr lang="en-US" sz="2800" dirty="0"/>
+            <a:endParaRPr lang="en-US" dirty="0"/>
           </a:p>
         </p:txBody>
       </p:sp>
@@ -1959,7 +1959,7 @@
               </a:rPr>
               <a:t>Internet</a:t>
             </a:r>
-            <a:endParaRPr lang="en-US" sz="2000" dirty="0"/>
+            <a:endParaRPr lang="en-US" sz="1400" dirty="0"/>
           </a:p>
         </p:txBody>
       </p:sp>
@@ -2204,7 +2204,7 @@
               <a:buNone/>
             </a:pPr>
             <a:r>
-              <a:rPr lang="en-US" sz="2000" b="1" dirty="0">
+              <a:rPr lang="en-US" sz="1400" b="1" dirty="0">
                 <a:solidFill>
                   <a:srgbClr val="FFFFFF"/>
                 </a:solidFill>
@@ -2214,7 +2214,7 @@
               </a:rPr>
               <a:t>HTTPS</a:t>
             </a:r>
-            <a:endParaRPr lang="en-US" sz="2000" dirty="0"/>
+            <a:endParaRPr lang="en-US" sz="1400" dirty="0"/>
           </a:p>
         </p:txBody>
       </p:sp>
@@ -2289,7 +2289,7 @@
               <a:buNone/>
             </a:pPr>
             <a:r>
-              <a:rPr lang="en-US" sz="2000" b="1" dirty="0">
+              <a:rPr lang="en-US" sz="1400" b="1" dirty="0">
                 <a:solidFill>
                   <a:srgbClr val="FFFFFF"/>
                 </a:solidFill>
@@ -2299,7 +2299,7 @@
               </a:rPr>
               <a:t>HTML</a:t>
             </a:r>
-            <a:endParaRPr lang="en-US" sz="2000" dirty="0"/>
+            <a:endParaRPr lang="en-US" sz="1400" dirty="0"/>
           </a:p>
         </p:txBody>
       </p:sp>
@@ -2328,7 +2328,7 @@
               <a:buNone/>
             </a:pPr>
             <a:r>
-              <a:rPr lang="en-US" i="1" dirty="0">
+              <a:rPr lang="en-US" sz="1200" i="1" dirty="0">
                 <a:solidFill>
                   <a:srgbClr val="8FA6B2"/>
                 </a:solidFill>
@@ -2338,7 +2338,7 @@
               </a:rPr>
               <a:t>Prepared for Lecture &amp; Seminar Use</a:t>
             </a:r>
-            <a:endParaRPr lang="en-US" dirty="0"/>
+            <a:endParaRPr lang="en-US" sz="1200" dirty="0"/>
           </a:p>
         </p:txBody>
       </p:sp>
